--- a/materials/1109-Slides-Abstraction-in-Java-Interfaces-Part-2.pptx
+++ b/materials/1109-Slides-Abstraction-in-Java-Interfaces-Part-2.pptx
@@ -2488,7 +2488,7 @@
           </a:ln>
           <a:extLst>
             <a:ext uri="{C572A759-6A51-4108-AA02-DFA0A04FC94B}">
-              <ma14:wrappingTextBoxFlag xmlns="" xmlns:ma14="http://schemas.microsoft.com/office/mac/drawingml/2011/main" val="1"/>
+              <ma14:wrappingTextBoxFlag xmlns:ma14="http://schemas.microsoft.com/office/mac/drawingml/2011/main" xmlns="" val="1"/>
             </a:ext>
           </a:extLst>
         </p:spPr>
@@ -2527,7 +2527,7 @@
           </a:ln>
           <a:extLst>
             <a:ext uri="{C572A759-6A51-4108-AA02-DFA0A04FC94B}">
-              <ma14:wrappingTextBoxFlag xmlns="" xmlns:ma14="http://schemas.microsoft.com/office/mac/drawingml/2011/main" val="1"/>
+              <ma14:wrappingTextBoxFlag xmlns:ma14="http://schemas.microsoft.com/office/mac/drawingml/2011/main" xmlns="" val="1"/>
             </a:ext>
           </a:extLst>
         </p:spPr>
@@ -3453,7 +3453,7 @@
           </a:ln>
           <a:extLst>
             <a:ext uri="{C572A759-6A51-4108-AA02-DFA0A04FC94B}">
-              <ma14:wrappingTextBoxFlag xmlns="" xmlns:ma14="http://schemas.microsoft.com/office/mac/drawingml/2011/main" val="1"/>
+              <ma14:wrappingTextBoxFlag xmlns:ma14="http://schemas.microsoft.com/office/mac/drawingml/2011/main" xmlns="" val="1"/>
             </a:ext>
           </a:extLst>
         </p:spPr>
@@ -3607,7 +3607,7 @@
           </a:ln>
           <a:extLst>
             <a:ext uri="{C572A759-6A51-4108-AA02-DFA0A04FC94B}">
-              <ma14:wrappingTextBoxFlag xmlns:ma14="http://schemas.microsoft.com/office/mac/drawingml/2011/main" xmlns="" val="1"/>
+              <ma14:wrappingTextBoxFlag xmlns="" xmlns:ma14="http://schemas.microsoft.com/office/mac/drawingml/2011/main" val="1"/>
             </a:ext>
           </a:extLst>
         </p:spPr>
@@ -3891,7 +3891,7 @@
           </a:ln>
           <a:extLst>
             <a:ext uri="{C572A759-6A51-4108-AA02-DFA0A04FC94B}">
-              <ma14:wrappingTextBoxFlag xmlns:ma14="http://schemas.microsoft.com/office/mac/drawingml/2011/main" xmlns="" val="1"/>
+              <ma14:wrappingTextBoxFlag xmlns="" xmlns:ma14="http://schemas.microsoft.com/office/mac/drawingml/2011/main" val="1"/>
             </a:ext>
           </a:extLst>
         </p:spPr>
@@ -4045,7 +4045,7 @@
           </a:ln>
           <a:extLst>
             <a:ext uri="{C572A759-6A51-4108-AA02-DFA0A04FC94B}">
-              <ma14:wrappingTextBoxFlag xmlns="" xmlns:ma14="http://schemas.microsoft.com/office/mac/drawingml/2011/main" val="1"/>
+              <ma14:wrappingTextBoxFlag xmlns:ma14="http://schemas.microsoft.com/office/mac/drawingml/2011/main" xmlns="" val="1"/>
             </a:ext>
           </a:extLst>
         </p:spPr>
@@ -4297,7 +4297,7 @@
           </a:ln>
           <a:extLst>
             <a:ext uri="{C572A759-6A51-4108-AA02-DFA0A04FC94B}">
-              <ma14:wrappingTextBoxFlag xmlns="" xmlns:ma14="http://schemas.microsoft.com/office/mac/drawingml/2011/main" val="1"/>
+              <ma14:wrappingTextBoxFlag xmlns:ma14="http://schemas.microsoft.com/office/mac/drawingml/2011/main" xmlns="" val="1"/>
             </a:ext>
           </a:extLst>
         </p:spPr>
@@ -4451,7 +4451,7 @@
           </a:ln>
           <a:extLst>
             <a:ext uri="{C572A759-6A51-4108-AA02-DFA0A04FC94B}">
-              <ma14:wrappingTextBoxFlag xmlns:ma14="http://schemas.microsoft.com/office/mac/drawingml/2011/main" xmlns="" val="1"/>
+              <ma14:wrappingTextBoxFlag xmlns="" xmlns:ma14="http://schemas.microsoft.com/office/mac/drawingml/2011/main" val="1"/>
             </a:ext>
           </a:extLst>
         </p:spPr>
@@ -4674,7 +4674,7 @@
           </a:ln>
           <a:extLst>
             <a:ext uri="{C572A759-6A51-4108-AA02-DFA0A04FC94B}">
-              <ma14:wrappingTextBoxFlag xmlns:ma14="http://schemas.microsoft.com/office/mac/drawingml/2011/main" xmlns="" val="1"/>
+              <ma14:wrappingTextBoxFlag xmlns="" xmlns:ma14="http://schemas.microsoft.com/office/mac/drawingml/2011/main" val="1"/>
             </a:ext>
           </a:extLst>
         </p:spPr>
@@ -4844,7 +4844,7 @@
           </a:ln>
           <a:extLst>
             <a:ext uri="{C572A759-6A51-4108-AA02-DFA0A04FC94B}">
-              <ma14:wrappingTextBoxFlag xmlns="" xmlns:ma14="http://schemas.microsoft.com/office/mac/drawingml/2011/main" val="1"/>
+              <ma14:wrappingTextBoxFlag xmlns:ma14="http://schemas.microsoft.com/office/mac/drawingml/2011/main" xmlns="" val="1"/>
             </a:ext>
           </a:extLst>
         </p:spPr>
@@ -5097,7 +5097,7 @@
           </a:ln>
           <a:extLst>
             <a:ext uri="{C572A759-6A51-4108-AA02-DFA0A04FC94B}">
-              <ma14:wrappingTextBoxFlag xmlns:ma14="http://schemas.microsoft.com/office/mac/drawingml/2011/main" xmlns="" val="1"/>
+              <ma14:wrappingTextBoxFlag xmlns="" xmlns:ma14="http://schemas.microsoft.com/office/mac/drawingml/2011/main" val="1"/>
             </a:ext>
           </a:extLst>
         </p:spPr>
@@ -5251,7 +5251,7 @@
           </a:ln>
           <a:extLst>
             <a:ext uri="{C572A759-6A51-4108-AA02-DFA0A04FC94B}">
-              <ma14:wrappingTextBoxFlag xmlns="" xmlns:ma14="http://schemas.microsoft.com/office/mac/drawingml/2011/main" val="1"/>
+              <ma14:wrappingTextBoxFlag xmlns:ma14="http://schemas.microsoft.com/office/mac/drawingml/2011/main" xmlns="" val="1"/>
             </a:ext>
           </a:extLst>
         </p:spPr>
@@ -5459,7 +5459,7 @@
           </a:ln>
           <a:extLst>
             <a:ext uri="{C572A759-6A51-4108-AA02-DFA0A04FC94B}">
-              <ma14:wrappingTextBoxFlag xmlns="" xmlns:ma14="http://schemas.microsoft.com/office/mac/drawingml/2011/main" val="1"/>
+              <ma14:wrappingTextBoxFlag xmlns:ma14="http://schemas.microsoft.com/office/mac/drawingml/2011/main" xmlns="" val="1"/>
             </a:ext>
           </a:extLst>
         </p:spPr>
@@ -5613,7 +5613,7 @@
           </a:ln>
           <a:extLst>
             <a:ext uri="{C572A759-6A51-4108-AA02-DFA0A04FC94B}">
-              <ma14:wrappingTextBoxFlag xmlns:ma14="http://schemas.microsoft.com/office/mac/drawingml/2011/main" xmlns="" val="1"/>
+              <ma14:wrappingTextBoxFlag xmlns="" xmlns:ma14="http://schemas.microsoft.com/office/mac/drawingml/2011/main" val="1"/>
             </a:ext>
           </a:extLst>
         </p:spPr>
@@ -5787,7 +5787,7 @@
           </a:ln>
           <a:extLst>
             <a:ext uri="{C572A759-6A51-4108-AA02-DFA0A04FC94B}">
-              <ma14:wrappingTextBoxFlag xmlns="" xmlns:ma14="http://schemas.microsoft.com/office/mac/drawingml/2011/main" val="1"/>
+              <ma14:wrappingTextBoxFlag xmlns:ma14="http://schemas.microsoft.com/office/mac/drawingml/2011/main" xmlns="" val="1"/>
             </a:ext>
           </a:extLst>
         </p:spPr>
@@ -5941,7 +5941,7 @@
           </a:ln>
           <a:extLst>
             <a:ext uri="{C572A759-6A51-4108-AA02-DFA0A04FC94B}">
-              <ma14:wrappingTextBoxFlag xmlns:ma14="http://schemas.microsoft.com/office/mac/drawingml/2011/main" xmlns="" val="1"/>
+              <ma14:wrappingTextBoxFlag xmlns="" xmlns:ma14="http://schemas.microsoft.com/office/mac/drawingml/2011/main" val="1"/>
             </a:ext>
           </a:extLst>
         </p:spPr>
@@ -6157,7 +6157,7 @@
           </a:ln>
           <a:extLst>
             <a:ext uri="{C572A759-6A51-4108-AA02-DFA0A04FC94B}">
-              <ma14:wrappingTextBoxFlag xmlns:ma14="http://schemas.microsoft.com/office/mac/drawingml/2011/main" xmlns="" val="1"/>
+              <ma14:wrappingTextBoxFlag xmlns="" xmlns:ma14="http://schemas.microsoft.com/office/mac/drawingml/2011/main" val="1"/>
             </a:ext>
           </a:extLst>
         </p:spPr>
@@ -6311,7 +6311,7 @@
           </a:ln>
           <a:extLst>
             <a:ext uri="{C572A759-6A51-4108-AA02-DFA0A04FC94B}">
-              <ma14:wrappingTextBoxFlag xmlns="" xmlns:ma14="http://schemas.microsoft.com/office/mac/drawingml/2011/main" val="1"/>
+              <ma14:wrappingTextBoxFlag xmlns:ma14="http://schemas.microsoft.com/office/mac/drawingml/2011/main" xmlns="" val="1"/>
             </a:ext>
           </a:extLst>
         </p:spPr>
